--- a/플로우차트.pptx
+++ b/플로우차트.pptx
@@ -5,12 +5,11 @@
     <p:sldMasterId id="2147483648" r:id="rId1"/>
   </p:sldMasterIdLst>
   <p:notesMasterIdLst>
-    <p:notesMasterId r:id="rId5"/>
+    <p:notesMasterId r:id="rId4"/>
   </p:notesMasterIdLst>
   <p:sldIdLst>
-    <p:sldId id="256" r:id="rId2"/>
-    <p:sldId id="257" r:id="rId3"/>
-    <p:sldId id="258" r:id="rId4"/>
+    <p:sldId id="258" r:id="rId2"/>
+    <p:sldId id="259" r:id="rId3"/>
   </p:sldIdLst>
   <p:sldSz cx="12192000" cy="6858000"/>
   <p:notesSz cx="6858000" cy="9144000"/>
@@ -109,6 +108,11 @@
       </a:defRPr>
     </a:lvl9pPr>
   </p:defaultTextStyle>
+  <p:extLst>
+    <p:ext uri="{EFAFB233-063F-42B5-8137-9DF3F51BA10A}">
+      <p15:sldGuideLst xmlns:p15="http://schemas.microsoft.com/office/powerpoint/2012/main"/>
+    </p:ext>
+  </p:extLst>
 </p:presentation>
 </file>
 
@@ -194,7 +198,7 @@
           <a:p>
             <a:fld id="{B5C53121-5206-4ED6-9FB7-F2D829613B50}" type="datetimeFigureOut">
               <a:rPr lang="ko-KR" altLang="en-US" smtClean="0"/>
-              <a:t>2026-10-01</a:t>
+              <a:t>2026-10-02</a:t>
             </a:fld>
             <a:endParaRPr lang="ko-KR" altLang="en-US"/>
           </a:p>
@@ -526,7 +530,7 @@
           <a:p>
             <a:fld id="{B1F2DA03-5E09-4134-BA82-BDA064724316}" type="slidenum">
               <a:rPr lang="ko-KR" altLang="en-US" smtClean="0"/>
-              <a:t>3</a:t>
+              <a:t>1</a:t>
             </a:fld>
             <a:endParaRPr lang="ko-KR" altLang="en-US"/>
           </a:p>
@@ -536,6 +540,114 @@
     <p:extLst>
       <p:ext uri="{BB962C8B-B14F-4D97-AF65-F5344CB8AC3E}">
         <p14:creationId xmlns:p14="http://schemas.microsoft.com/office/powerpoint/2010/main" val="805202632"/>
+      </p:ext>
+    </p:extLst>
+  </p:cSld>
+  <p:clrMapOvr>
+    <a:masterClrMapping/>
+  </p:clrMapOvr>
+</p:notes>
+</file>
+
+<file path=ppt/notesSlides/notesSlide2.xml><?xml version="1.0" encoding="utf-8"?>
+<p:notes xmlns:a="http://schemas.openxmlformats.org/drawingml/2006/main" xmlns:r="http://schemas.openxmlformats.org/officeDocument/2006/relationships" xmlns:p="http://schemas.openxmlformats.org/presentationml/2006/main">
+  <p:cSld>
+    <p:spTree>
+      <p:nvGrpSpPr>
+        <p:cNvPr id="1" name="">
+          <a:extLst>
+            <a:ext uri="{FF2B5EF4-FFF2-40B4-BE49-F238E27FC236}">
+              <a16:creationId xmlns:a16="http://schemas.microsoft.com/office/drawing/2014/main" id="{82DB4059-2B4A-0FE7-861C-74D76076FDE1}"/>
+            </a:ext>
+          </a:extLst>
+        </p:cNvPr>
+        <p:cNvGrpSpPr/>
+        <p:nvPr/>
+      </p:nvGrpSpPr>
+      <p:grpSpPr>
+        <a:xfrm>
+          <a:off x="0" y="0"/>
+          <a:ext cx="0" cy="0"/>
+          <a:chOff x="0" y="0"/>
+          <a:chExt cx="0" cy="0"/>
+        </a:xfrm>
+      </p:grpSpPr>
+      <p:sp>
+        <p:nvSpPr>
+          <p:cNvPr id="2" name="슬라이드 이미지 개체 틀 1">
+            <a:extLst>
+              <a:ext uri="{FF2B5EF4-FFF2-40B4-BE49-F238E27FC236}">
+                <a16:creationId xmlns:a16="http://schemas.microsoft.com/office/drawing/2014/main" id="{2745319C-9911-ECEF-FBFB-FA497CAFB895}"/>
+              </a:ext>
+            </a:extLst>
+          </p:cNvPr>
+          <p:cNvSpPr>
+            <a:spLocks noGrp="1" noRot="1" noChangeAspect="1"/>
+          </p:cNvSpPr>
+          <p:nvPr>
+            <p:ph type="sldImg"/>
+          </p:nvPr>
+        </p:nvSpPr>
+        <p:spPr/>
+      </p:sp>
+      <p:sp>
+        <p:nvSpPr>
+          <p:cNvPr id="3" name="슬라이드 노트 개체 틀 2">
+            <a:extLst>
+              <a:ext uri="{FF2B5EF4-FFF2-40B4-BE49-F238E27FC236}">
+                <a16:creationId xmlns:a16="http://schemas.microsoft.com/office/drawing/2014/main" id="{001A1C51-6921-5AA1-18ED-9C4A810A0A4E}"/>
+              </a:ext>
+            </a:extLst>
+          </p:cNvPr>
+          <p:cNvSpPr>
+            <a:spLocks noGrp="1"/>
+          </p:cNvSpPr>
+          <p:nvPr>
+            <p:ph type="body" idx="1"/>
+          </p:nvPr>
+        </p:nvSpPr>
+        <p:spPr/>
+        <p:txBody>
+          <a:bodyPr/>
+          <a:lstStyle/>
+          <a:p>
+            <a:endParaRPr lang="ko-KR" altLang="en-US" dirty="0"/>
+          </a:p>
+        </p:txBody>
+      </p:sp>
+      <p:sp>
+        <p:nvSpPr>
+          <p:cNvPr id="4" name="슬라이드 번호 개체 틀 3">
+            <a:extLst>
+              <a:ext uri="{FF2B5EF4-FFF2-40B4-BE49-F238E27FC236}">
+                <a16:creationId xmlns:a16="http://schemas.microsoft.com/office/drawing/2014/main" id="{5FD8CBAD-CA12-AE52-0808-CD97695EDCFB}"/>
+              </a:ext>
+            </a:extLst>
+          </p:cNvPr>
+          <p:cNvSpPr>
+            <a:spLocks noGrp="1"/>
+          </p:cNvSpPr>
+          <p:nvPr>
+            <p:ph type="sldNum" sz="quarter" idx="5"/>
+          </p:nvPr>
+        </p:nvSpPr>
+        <p:spPr/>
+        <p:txBody>
+          <a:bodyPr/>
+          <a:lstStyle/>
+          <a:p>
+            <a:fld id="{B1F2DA03-5E09-4134-BA82-BDA064724316}" type="slidenum">
+              <a:rPr lang="ko-KR" altLang="en-US" smtClean="0"/>
+              <a:t>2</a:t>
+            </a:fld>
+            <a:endParaRPr lang="ko-KR" altLang="en-US"/>
+          </a:p>
+        </p:txBody>
+      </p:sp>
+    </p:spTree>
+    <p:extLst>
+      <p:ext uri="{BB962C8B-B14F-4D97-AF65-F5344CB8AC3E}">
+        <p14:creationId xmlns:p14="http://schemas.microsoft.com/office/powerpoint/2010/main" val="1549615088"/>
       </p:ext>
     </p:extLst>
   </p:cSld>
@@ -692,7 +804,7 @@
           <a:p>
             <a:fld id="{E78E5E00-D978-44F4-8D0C-D5553081CAD0}" type="datetimeFigureOut">
               <a:rPr lang="ko-KR" altLang="en-US" smtClean="0"/>
-              <a:t>2026-10-01</a:t>
+              <a:t>2026-10-02</a:t>
             </a:fld>
             <a:endParaRPr lang="ko-KR" altLang="en-US"/>
           </a:p>
@@ -890,7 +1002,7 @@
           <a:p>
             <a:fld id="{E78E5E00-D978-44F4-8D0C-D5553081CAD0}" type="datetimeFigureOut">
               <a:rPr lang="ko-KR" altLang="en-US" smtClean="0"/>
-              <a:t>2026-10-01</a:t>
+              <a:t>2026-10-02</a:t>
             </a:fld>
             <a:endParaRPr lang="ko-KR" altLang="en-US"/>
           </a:p>
@@ -1098,7 +1210,7 @@
           <a:p>
             <a:fld id="{E78E5E00-D978-44F4-8D0C-D5553081CAD0}" type="datetimeFigureOut">
               <a:rPr lang="ko-KR" altLang="en-US" smtClean="0"/>
-              <a:t>2026-10-01</a:t>
+              <a:t>2026-10-02</a:t>
             </a:fld>
             <a:endParaRPr lang="ko-KR" altLang="en-US"/>
           </a:p>
@@ -1296,7 +1408,7 @@
           <a:p>
             <a:fld id="{E78E5E00-D978-44F4-8D0C-D5553081CAD0}" type="datetimeFigureOut">
               <a:rPr lang="ko-KR" altLang="en-US" smtClean="0"/>
-              <a:t>2026-10-01</a:t>
+              <a:t>2026-10-02</a:t>
             </a:fld>
             <a:endParaRPr lang="ko-KR" altLang="en-US"/>
           </a:p>
@@ -1571,7 +1683,7 @@
           <a:p>
             <a:fld id="{E78E5E00-D978-44F4-8D0C-D5553081CAD0}" type="datetimeFigureOut">
               <a:rPr lang="ko-KR" altLang="en-US" smtClean="0"/>
-              <a:t>2026-10-01</a:t>
+              <a:t>2026-10-02</a:t>
             </a:fld>
             <a:endParaRPr lang="ko-KR" altLang="en-US"/>
           </a:p>
@@ -1836,7 +1948,7 @@
           <a:p>
             <a:fld id="{E78E5E00-D978-44F4-8D0C-D5553081CAD0}" type="datetimeFigureOut">
               <a:rPr lang="ko-KR" altLang="en-US" smtClean="0"/>
-              <a:t>2026-10-01</a:t>
+              <a:t>2026-10-02</a:t>
             </a:fld>
             <a:endParaRPr lang="ko-KR" altLang="en-US"/>
           </a:p>
@@ -2248,7 +2360,7 @@
           <a:p>
             <a:fld id="{E78E5E00-D978-44F4-8D0C-D5553081CAD0}" type="datetimeFigureOut">
               <a:rPr lang="ko-KR" altLang="en-US" smtClean="0"/>
-              <a:t>2026-10-01</a:t>
+              <a:t>2026-10-02</a:t>
             </a:fld>
             <a:endParaRPr lang="ko-KR" altLang="en-US"/>
           </a:p>
@@ -2389,7 +2501,7 @@
           <a:p>
             <a:fld id="{E78E5E00-D978-44F4-8D0C-D5553081CAD0}" type="datetimeFigureOut">
               <a:rPr lang="ko-KR" altLang="en-US" smtClean="0"/>
-              <a:t>2026-10-01</a:t>
+              <a:t>2026-10-02</a:t>
             </a:fld>
             <a:endParaRPr lang="ko-KR" altLang="en-US"/>
           </a:p>
@@ -2502,7 +2614,7 @@
           <a:p>
             <a:fld id="{E78E5E00-D978-44F4-8D0C-D5553081CAD0}" type="datetimeFigureOut">
               <a:rPr lang="ko-KR" altLang="en-US" smtClean="0"/>
-              <a:t>2026-10-01</a:t>
+              <a:t>2026-10-02</a:t>
             </a:fld>
             <a:endParaRPr lang="ko-KR" altLang="en-US"/>
           </a:p>
@@ -2813,7 +2925,7 @@
           <a:p>
             <a:fld id="{E78E5E00-D978-44F4-8D0C-D5553081CAD0}" type="datetimeFigureOut">
               <a:rPr lang="ko-KR" altLang="en-US" smtClean="0"/>
-              <a:t>2026-10-01</a:t>
+              <a:t>2026-10-02</a:t>
             </a:fld>
             <a:endParaRPr lang="ko-KR" altLang="en-US"/>
           </a:p>
@@ -3101,7 +3213,7 @@
           <a:p>
             <a:fld id="{E78E5E00-D978-44F4-8D0C-D5553081CAD0}" type="datetimeFigureOut">
               <a:rPr lang="ko-KR" altLang="en-US" smtClean="0"/>
-              <a:t>2026-10-01</a:t>
+              <a:t>2026-10-02</a:t>
             </a:fld>
             <a:endParaRPr lang="ko-KR" altLang="en-US"/>
           </a:p>
@@ -3342,7 +3454,7 @@
           <a:p>
             <a:fld id="{E78E5E00-D978-44F4-8D0C-D5553081CAD0}" type="datetimeFigureOut">
               <a:rPr lang="ko-KR" altLang="en-US" smtClean="0"/>
-              <a:t>2026-10-01</a:t>
+              <a:t>2026-10-02</a:t>
             </a:fld>
             <a:endParaRPr lang="ko-KR" altLang="en-US"/>
           </a:p>
@@ -3761,58 +3873,910 @@
       </p:grpSpPr>
       <p:sp>
         <p:nvSpPr>
-          <p:cNvPr id="2" name="제목 1">
-            <a:extLst>
-              <a:ext uri="{FF2B5EF4-FFF2-40B4-BE49-F238E27FC236}">
-                <a16:creationId xmlns:a16="http://schemas.microsoft.com/office/drawing/2014/main" id="{B1B5791B-A8F0-95B4-D58D-FE311FEB336F}"/>
-              </a:ext>
-            </a:extLst>
-          </p:cNvPr>
-          <p:cNvSpPr>
-            <a:spLocks noGrp="1"/>
-          </p:cNvSpPr>
-          <p:nvPr>
-            <p:ph type="ctrTitle"/>
-          </p:nvPr>
-        </p:nvSpPr>
-        <p:spPr/>
-        <p:txBody>
-          <a:bodyPr/>
-          <a:lstStyle/>
-          <a:p>
-            <a:endParaRPr lang="ko-KR" altLang="en-US"/>
-          </a:p>
-        </p:txBody>
-      </p:sp>
-      <p:sp>
-        <p:nvSpPr>
-          <p:cNvPr id="3" name="부제목 2">
-            <a:extLst>
-              <a:ext uri="{FF2B5EF4-FFF2-40B4-BE49-F238E27FC236}">
-                <a16:creationId xmlns:a16="http://schemas.microsoft.com/office/drawing/2014/main" id="{E5A66724-D821-AB6C-D4CB-4BCCFD8F0F33}"/>
-              </a:ext>
-            </a:extLst>
-          </p:cNvPr>
-          <p:cNvSpPr>
-            <a:spLocks noGrp="1"/>
-          </p:cNvSpPr>
-          <p:nvPr>
-            <p:ph type="subTitle" idx="1"/>
-          </p:nvPr>
-        </p:nvSpPr>
-        <p:spPr/>
-        <p:txBody>
-          <a:bodyPr/>
-          <a:lstStyle/>
-          <a:p>
-            <a:endParaRPr lang="ko-KR" altLang="en-US"/>
-          </a:p>
-        </p:txBody>
-      </p:sp>
+          <p:cNvPr id="5" name="순서도: 수행의 시작/종료 4">
+            <a:extLst>
+              <a:ext uri="{FF2B5EF4-FFF2-40B4-BE49-F238E27FC236}">
+                <a16:creationId xmlns:a16="http://schemas.microsoft.com/office/drawing/2014/main" id="{25816508-7023-BE17-3EBC-6D4641388ECF}"/>
+              </a:ext>
+            </a:extLst>
+          </p:cNvPr>
+          <p:cNvSpPr/>
+          <p:nvPr/>
+        </p:nvSpPr>
+        <p:spPr>
+          <a:xfrm>
+            <a:off x="4255046" y="1273897"/>
+            <a:ext cx="1319606" cy="401145"/>
+          </a:xfrm>
+          <a:prstGeom prst="flowChartTerminator">
+            <a:avLst/>
+          </a:prstGeom>
+        </p:spPr>
+        <p:style>
+          <a:lnRef idx="1">
+            <a:schemeClr val="accent6"/>
+          </a:lnRef>
+          <a:fillRef idx="2">
+            <a:schemeClr val="accent6"/>
+          </a:fillRef>
+          <a:effectRef idx="1">
+            <a:schemeClr val="accent6"/>
+          </a:effectRef>
+          <a:fontRef idx="minor">
+            <a:schemeClr val="dk1"/>
+          </a:fontRef>
+        </p:style>
+        <p:txBody>
+          <a:bodyPr rtlCol="0" anchor="ctr"/>
+          <a:lstStyle/>
+          <a:p>
+            <a:pPr algn="ctr"/>
+            <a:r>
+              <a:rPr lang="ko-KR" altLang="en-US" sz="1400" dirty="0"/>
+              <a:t>시작</a:t>
+            </a:r>
+          </a:p>
+        </p:txBody>
+      </p:sp>
+      <p:sp>
+        <p:nvSpPr>
+          <p:cNvPr id="7" name="순서도: 판단 6">
+            <a:extLst>
+              <a:ext uri="{FF2B5EF4-FFF2-40B4-BE49-F238E27FC236}">
+                <a16:creationId xmlns:a16="http://schemas.microsoft.com/office/drawing/2014/main" id="{AAD315E9-B34E-620B-E847-99A89017D2A4}"/>
+              </a:ext>
+            </a:extLst>
+          </p:cNvPr>
+          <p:cNvSpPr/>
+          <p:nvPr/>
+        </p:nvSpPr>
+        <p:spPr>
+          <a:xfrm>
+            <a:off x="4352712" y="2880080"/>
+            <a:ext cx="1124274" cy="504671"/>
+          </a:xfrm>
+          <a:prstGeom prst="flowChartDecision">
+            <a:avLst/>
+          </a:prstGeom>
+        </p:spPr>
+        <p:style>
+          <a:lnRef idx="2">
+            <a:schemeClr val="accent1">
+              <a:shade val="15000"/>
+            </a:schemeClr>
+          </a:lnRef>
+          <a:fillRef idx="1">
+            <a:schemeClr val="accent1"/>
+          </a:fillRef>
+          <a:effectRef idx="0">
+            <a:schemeClr val="accent1"/>
+          </a:effectRef>
+          <a:fontRef idx="minor">
+            <a:schemeClr val="lt1"/>
+          </a:fontRef>
+        </p:style>
+        <p:txBody>
+          <a:bodyPr rtlCol="0" anchor="ctr"/>
+          <a:lstStyle/>
+          <a:p>
+            <a:pPr algn="ctr"/>
+            <a:r>
+              <a:rPr lang="ko-KR" altLang="en-US" sz="1400" dirty="0"/>
+              <a:t>메뉴</a:t>
+            </a:r>
+            <a:endParaRPr lang="en-US" altLang="ko-KR" sz="1400" dirty="0"/>
+          </a:p>
+          <a:p>
+            <a:pPr algn="ctr"/>
+            <a:r>
+              <a:rPr lang="ko-KR" altLang="en-US" sz="1400" dirty="0"/>
+              <a:t>선택</a:t>
+            </a:r>
+          </a:p>
+        </p:txBody>
+      </p:sp>
+      <p:sp>
+        <p:nvSpPr>
+          <p:cNvPr id="8" name="순서도: 데이터 7">
+            <a:extLst>
+              <a:ext uri="{FF2B5EF4-FFF2-40B4-BE49-F238E27FC236}">
+                <a16:creationId xmlns:a16="http://schemas.microsoft.com/office/drawing/2014/main" id="{FB9A5DC1-9C09-BA2F-3D10-60DA26B79901}"/>
+              </a:ext>
+            </a:extLst>
+          </p:cNvPr>
+          <p:cNvSpPr/>
+          <p:nvPr/>
+        </p:nvSpPr>
+        <p:spPr>
+          <a:xfrm>
+            <a:off x="4352712" y="2043537"/>
+            <a:ext cx="1124274" cy="504671"/>
+          </a:xfrm>
+          <a:prstGeom prst="flowChartInputOutput">
+            <a:avLst/>
+          </a:prstGeom>
+        </p:spPr>
+        <p:style>
+          <a:lnRef idx="2">
+            <a:schemeClr val="accent1">
+              <a:shade val="15000"/>
+            </a:schemeClr>
+          </a:lnRef>
+          <a:fillRef idx="1">
+            <a:schemeClr val="accent1"/>
+          </a:fillRef>
+          <a:effectRef idx="0">
+            <a:schemeClr val="accent1"/>
+          </a:effectRef>
+          <a:fontRef idx="minor">
+            <a:schemeClr val="lt1"/>
+          </a:fontRef>
+        </p:style>
+        <p:txBody>
+          <a:bodyPr rtlCol="0" anchor="ctr"/>
+          <a:lstStyle/>
+          <a:p>
+            <a:pPr algn="ctr"/>
+            <a:r>
+              <a:rPr lang="ko-KR" altLang="en-US" sz="1400" dirty="0"/>
+              <a:t>입력</a:t>
+            </a:r>
+          </a:p>
+        </p:txBody>
+      </p:sp>
+      <p:sp>
+        <p:nvSpPr>
+          <p:cNvPr id="18" name="순서도: 처리 17">
+            <a:extLst>
+              <a:ext uri="{FF2B5EF4-FFF2-40B4-BE49-F238E27FC236}">
+                <a16:creationId xmlns:a16="http://schemas.microsoft.com/office/drawing/2014/main" id="{2A1B12FC-55E2-7888-F98E-181FE06EF660}"/>
+              </a:ext>
+            </a:extLst>
+          </p:cNvPr>
+          <p:cNvSpPr/>
+          <p:nvPr/>
+        </p:nvSpPr>
+        <p:spPr>
+          <a:xfrm>
+            <a:off x="6435797" y="5405971"/>
+            <a:ext cx="1124274" cy="503254"/>
+          </a:xfrm>
+          <a:prstGeom prst="flowChartProcess">
+            <a:avLst/>
+          </a:prstGeom>
+        </p:spPr>
+        <p:style>
+          <a:lnRef idx="2">
+            <a:schemeClr val="accent1">
+              <a:shade val="15000"/>
+            </a:schemeClr>
+          </a:lnRef>
+          <a:fillRef idx="1">
+            <a:schemeClr val="accent1"/>
+          </a:fillRef>
+          <a:effectRef idx="0">
+            <a:schemeClr val="accent1"/>
+          </a:effectRef>
+          <a:fontRef idx="minor">
+            <a:schemeClr val="lt1"/>
+          </a:fontRef>
+        </p:style>
+        <p:txBody>
+          <a:bodyPr rtlCol="0" anchor="ctr"/>
+          <a:lstStyle/>
+          <a:p>
+            <a:pPr algn="ctr"/>
+            <a:r>
+              <a:rPr lang="ko-KR" altLang="en-US" sz="1200" dirty="0"/>
+              <a:t>예매 처리</a:t>
+            </a:r>
+          </a:p>
+        </p:txBody>
+      </p:sp>
+      <p:sp>
+        <p:nvSpPr>
+          <p:cNvPr id="46" name="순서도: 판단 45">
+            <a:extLst>
+              <a:ext uri="{FF2B5EF4-FFF2-40B4-BE49-F238E27FC236}">
+                <a16:creationId xmlns:a16="http://schemas.microsoft.com/office/drawing/2014/main" id="{19104F41-3847-5F00-2EAF-3052ECF04B43}"/>
+              </a:ext>
+            </a:extLst>
+          </p:cNvPr>
+          <p:cNvSpPr/>
+          <p:nvPr/>
+        </p:nvSpPr>
+        <p:spPr>
+          <a:xfrm>
+            <a:off x="6435797" y="4558848"/>
+            <a:ext cx="1124274" cy="504671"/>
+          </a:xfrm>
+          <a:prstGeom prst="flowChartDecision">
+            <a:avLst/>
+          </a:prstGeom>
+        </p:spPr>
+        <p:style>
+          <a:lnRef idx="2">
+            <a:schemeClr val="accent1">
+              <a:shade val="15000"/>
+            </a:schemeClr>
+          </a:lnRef>
+          <a:fillRef idx="1">
+            <a:schemeClr val="accent1"/>
+          </a:fillRef>
+          <a:effectRef idx="0">
+            <a:schemeClr val="accent1"/>
+          </a:effectRef>
+          <a:fontRef idx="minor">
+            <a:schemeClr val="lt1"/>
+          </a:fontRef>
+        </p:style>
+        <p:txBody>
+          <a:bodyPr rtlCol="0" anchor="ctr"/>
+          <a:lstStyle/>
+          <a:p>
+            <a:pPr algn="ctr"/>
+            <a:r>
+              <a:rPr lang="ko-KR" altLang="en-US" sz="1400" dirty="0"/>
+              <a:t>확인</a:t>
+            </a:r>
+            <a:endParaRPr lang="en-US" altLang="ko-KR" sz="1400" dirty="0"/>
+          </a:p>
+        </p:txBody>
+      </p:sp>
+      <p:sp>
+        <p:nvSpPr>
+          <p:cNvPr id="48" name="순서도: 데이터 47">
+            <a:extLst>
+              <a:ext uri="{FF2B5EF4-FFF2-40B4-BE49-F238E27FC236}">
+                <a16:creationId xmlns:a16="http://schemas.microsoft.com/office/drawing/2014/main" id="{71B5BA24-42B4-DFC5-431F-CB82A2A59078}"/>
+              </a:ext>
+            </a:extLst>
+          </p:cNvPr>
+          <p:cNvSpPr/>
+          <p:nvPr/>
+        </p:nvSpPr>
+        <p:spPr>
+          <a:xfrm>
+            <a:off x="6435797" y="1170371"/>
+            <a:ext cx="1124274" cy="504671"/>
+          </a:xfrm>
+          <a:prstGeom prst="flowChartInputOutput">
+            <a:avLst/>
+          </a:prstGeom>
+        </p:spPr>
+        <p:style>
+          <a:lnRef idx="2">
+            <a:schemeClr val="accent1">
+              <a:shade val="15000"/>
+            </a:schemeClr>
+          </a:lnRef>
+          <a:fillRef idx="1">
+            <a:schemeClr val="accent1"/>
+          </a:fillRef>
+          <a:effectRef idx="0">
+            <a:schemeClr val="accent1"/>
+          </a:effectRef>
+          <a:fontRef idx="minor">
+            <a:schemeClr val="lt1"/>
+          </a:fontRef>
+        </p:style>
+        <p:txBody>
+          <a:bodyPr rtlCol="0" anchor="ctr"/>
+          <a:lstStyle/>
+          <a:p>
+            <a:pPr algn="ctr"/>
+            <a:r>
+              <a:rPr lang="ko-KR" altLang="en-US" sz="1200" dirty="0"/>
+              <a:t>영화</a:t>
+            </a:r>
+            <a:endParaRPr lang="en-US" altLang="ko-KR" sz="1200" dirty="0"/>
+          </a:p>
+          <a:p>
+            <a:pPr algn="ctr"/>
+            <a:r>
+              <a:rPr lang="ko-KR" altLang="en-US" sz="1200" dirty="0"/>
+              <a:t>선택</a:t>
+            </a:r>
+          </a:p>
+        </p:txBody>
+      </p:sp>
+      <p:sp>
+        <p:nvSpPr>
+          <p:cNvPr id="51" name="순서도: 데이터 50">
+            <a:extLst>
+              <a:ext uri="{FF2B5EF4-FFF2-40B4-BE49-F238E27FC236}">
+                <a16:creationId xmlns:a16="http://schemas.microsoft.com/office/drawing/2014/main" id="{58E59AEF-C0CC-BEE6-DF3D-0552C2379EB6}"/>
+              </a:ext>
+            </a:extLst>
+          </p:cNvPr>
+          <p:cNvSpPr/>
+          <p:nvPr/>
+        </p:nvSpPr>
+        <p:spPr>
+          <a:xfrm>
+            <a:off x="6435797" y="2017491"/>
+            <a:ext cx="1124274" cy="504671"/>
+          </a:xfrm>
+          <a:prstGeom prst="flowChartInputOutput">
+            <a:avLst/>
+          </a:prstGeom>
+        </p:spPr>
+        <p:style>
+          <a:lnRef idx="2">
+            <a:schemeClr val="accent1">
+              <a:shade val="15000"/>
+            </a:schemeClr>
+          </a:lnRef>
+          <a:fillRef idx="1">
+            <a:schemeClr val="accent1"/>
+          </a:fillRef>
+          <a:effectRef idx="0">
+            <a:schemeClr val="accent1"/>
+          </a:effectRef>
+          <a:fontRef idx="minor">
+            <a:schemeClr val="lt1"/>
+          </a:fontRef>
+        </p:style>
+        <p:txBody>
+          <a:bodyPr rtlCol="0" anchor="ctr"/>
+          <a:lstStyle/>
+          <a:p>
+            <a:pPr algn="ctr"/>
+            <a:r>
+              <a:rPr lang="ko-KR" altLang="en-US" sz="1200" dirty="0"/>
+              <a:t>상영관</a:t>
+            </a:r>
+            <a:endParaRPr lang="en-US" altLang="ko-KR" sz="1200" dirty="0"/>
+          </a:p>
+          <a:p>
+            <a:pPr algn="ctr"/>
+            <a:r>
+              <a:rPr lang="ko-KR" altLang="en-US" sz="1200" dirty="0"/>
+              <a:t>선택</a:t>
+            </a:r>
+          </a:p>
+        </p:txBody>
+      </p:sp>
+      <p:sp>
+        <p:nvSpPr>
+          <p:cNvPr id="54" name="순서도: 데이터 53">
+            <a:extLst>
+              <a:ext uri="{FF2B5EF4-FFF2-40B4-BE49-F238E27FC236}">
+                <a16:creationId xmlns:a16="http://schemas.microsoft.com/office/drawing/2014/main" id="{141DDCD1-FDEB-EFD6-C4CB-13EAEAFE6F2D}"/>
+              </a:ext>
+            </a:extLst>
+          </p:cNvPr>
+          <p:cNvSpPr/>
+          <p:nvPr/>
+        </p:nvSpPr>
+        <p:spPr>
+          <a:xfrm>
+            <a:off x="6435797" y="2864610"/>
+            <a:ext cx="1124274" cy="504671"/>
+          </a:xfrm>
+          <a:prstGeom prst="flowChartInputOutput">
+            <a:avLst/>
+          </a:prstGeom>
+        </p:spPr>
+        <p:style>
+          <a:lnRef idx="2">
+            <a:schemeClr val="accent1">
+              <a:shade val="15000"/>
+            </a:schemeClr>
+          </a:lnRef>
+          <a:fillRef idx="1">
+            <a:schemeClr val="accent1"/>
+          </a:fillRef>
+          <a:effectRef idx="0">
+            <a:schemeClr val="accent1"/>
+          </a:effectRef>
+          <a:fontRef idx="minor">
+            <a:schemeClr val="lt1"/>
+          </a:fontRef>
+        </p:style>
+        <p:txBody>
+          <a:bodyPr rtlCol="0" anchor="ctr"/>
+          <a:lstStyle/>
+          <a:p>
+            <a:pPr algn="ctr"/>
+            <a:r>
+              <a:rPr lang="ko-KR" altLang="en-US" sz="1200" dirty="0"/>
+              <a:t>좌석수</a:t>
+            </a:r>
+            <a:endParaRPr lang="en-US" altLang="ko-KR" sz="1200" dirty="0"/>
+          </a:p>
+          <a:p>
+            <a:pPr algn="ctr"/>
+            <a:r>
+              <a:rPr lang="ko-KR" altLang="en-US" sz="1200" dirty="0"/>
+              <a:t>선택</a:t>
+            </a:r>
+          </a:p>
+        </p:txBody>
+      </p:sp>
+      <p:sp>
+        <p:nvSpPr>
+          <p:cNvPr id="56" name="순서도: 데이터 55">
+            <a:extLst>
+              <a:ext uri="{FF2B5EF4-FFF2-40B4-BE49-F238E27FC236}">
+                <a16:creationId xmlns:a16="http://schemas.microsoft.com/office/drawing/2014/main" id="{599D7DA3-D7E9-CADB-DC87-D4F9C0367353}"/>
+              </a:ext>
+            </a:extLst>
+          </p:cNvPr>
+          <p:cNvSpPr/>
+          <p:nvPr/>
+        </p:nvSpPr>
+        <p:spPr>
+          <a:xfrm>
+            <a:off x="6435797" y="3711729"/>
+            <a:ext cx="1124274" cy="504671"/>
+          </a:xfrm>
+          <a:prstGeom prst="flowChartInputOutput">
+            <a:avLst/>
+          </a:prstGeom>
+        </p:spPr>
+        <p:style>
+          <a:lnRef idx="2">
+            <a:schemeClr val="accent1">
+              <a:shade val="15000"/>
+            </a:schemeClr>
+          </a:lnRef>
+          <a:fillRef idx="1">
+            <a:schemeClr val="accent1"/>
+          </a:fillRef>
+          <a:effectRef idx="0">
+            <a:schemeClr val="accent1"/>
+          </a:effectRef>
+          <a:fontRef idx="minor">
+            <a:schemeClr val="lt1"/>
+          </a:fontRef>
+        </p:style>
+        <p:txBody>
+          <a:bodyPr rtlCol="0" anchor="ctr"/>
+          <a:lstStyle/>
+          <a:p>
+            <a:pPr algn="ctr"/>
+            <a:r>
+              <a:rPr lang="ko-KR" altLang="en-US" sz="1200" dirty="0"/>
+              <a:t>좌석</a:t>
+            </a:r>
+            <a:endParaRPr lang="en-US" altLang="ko-KR" sz="1200" dirty="0"/>
+          </a:p>
+          <a:p>
+            <a:pPr algn="ctr"/>
+            <a:r>
+              <a:rPr lang="ko-KR" altLang="en-US" sz="1200" dirty="0"/>
+              <a:t>선택</a:t>
+            </a:r>
+          </a:p>
+        </p:txBody>
+      </p:sp>
+      <p:cxnSp>
+        <p:nvCxnSpPr>
+          <p:cNvPr id="58" name="연결선: 꺾임 57">
+            <a:extLst>
+              <a:ext uri="{FF2B5EF4-FFF2-40B4-BE49-F238E27FC236}">
+                <a16:creationId xmlns:a16="http://schemas.microsoft.com/office/drawing/2014/main" id="{92E79E51-394B-E35F-B123-F3E0F78C0B28}"/>
+              </a:ext>
+            </a:extLst>
+          </p:cNvPr>
+          <p:cNvCxnSpPr>
+            <a:cxnSpLocks/>
+            <a:stCxn id="7" idx="3"/>
+            <a:endCxn id="48" idx="1"/>
+          </p:cNvCxnSpPr>
+          <p:nvPr/>
+        </p:nvCxnSpPr>
+        <p:spPr>
+          <a:xfrm flipV="1">
+            <a:off x="5476986" y="1170371"/>
+            <a:ext cx="1520948" cy="1962045"/>
+          </a:xfrm>
+          <a:prstGeom prst="bentConnector4">
+            <a:avLst>
+              <a:gd name="adj1" fmla="val 31520"/>
+              <a:gd name="adj2" fmla="val 111651"/>
+            </a:avLst>
+          </a:prstGeom>
+          <a:ln>
+            <a:tailEnd type="triangle"/>
+          </a:ln>
+        </p:spPr>
+        <p:style>
+          <a:lnRef idx="2">
+            <a:schemeClr val="accent1"/>
+          </a:lnRef>
+          <a:fillRef idx="0">
+            <a:schemeClr val="accent1"/>
+          </a:fillRef>
+          <a:effectRef idx="1">
+            <a:schemeClr val="accent1"/>
+          </a:effectRef>
+          <a:fontRef idx="minor">
+            <a:schemeClr val="tx1"/>
+          </a:fontRef>
+        </p:style>
+      </p:cxnSp>
+      <p:cxnSp>
+        <p:nvCxnSpPr>
+          <p:cNvPr id="59" name="직선 화살표 연결선 58">
+            <a:extLst>
+              <a:ext uri="{FF2B5EF4-FFF2-40B4-BE49-F238E27FC236}">
+                <a16:creationId xmlns:a16="http://schemas.microsoft.com/office/drawing/2014/main" id="{307D2A52-E2BC-1DAA-95DB-3E42FF8BEB06}"/>
+              </a:ext>
+            </a:extLst>
+          </p:cNvPr>
+          <p:cNvCxnSpPr>
+            <a:cxnSpLocks/>
+            <a:stCxn id="5" idx="2"/>
+            <a:endCxn id="8" idx="1"/>
+          </p:cNvCxnSpPr>
+          <p:nvPr/>
+        </p:nvCxnSpPr>
+        <p:spPr>
+          <a:xfrm>
+            <a:off x="4914849" y="1675042"/>
+            <a:ext cx="0" cy="368495"/>
+          </a:xfrm>
+          <a:prstGeom prst="straightConnector1">
+            <a:avLst/>
+          </a:prstGeom>
+          <a:ln>
+            <a:tailEnd type="triangle"/>
+          </a:ln>
+        </p:spPr>
+        <p:style>
+          <a:lnRef idx="2">
+            <a:schemeClr val="accent1"/>
+          </a:lnRef>
+          <a:fillRef idx="0">
+            <a:schemeClr val="accent1"/>
+          </a:fillRef>
+          <a:effectRef idx="1">
+            <a:schemeClr val="accent1"/>
+          </a:effectRef>
+          <a:fontRef idx="minor">
+            <a:schemeClr val="tx1"/>
+          </a:fontRef>
+        </p:style>
+      </p:cxnSp>
+      <p:cxnSp>
+        <p:nvCxnSpPr>
+          <p:cNvPr id="62" name="직선 화살표 연결선 61">
+            <a:extLst>
+              <a:ext uri="{FF2B5EF4-FFF2-40B4-BE49-F238E27FC236}">
+                <a16:creationId xmlns:a16="http://schemas.microsoft.com/office/drawing/2014/main" id="{5EB93874-05A2-9BF1-1295-271A18E08C27}"/>
+              </a:ext>
+            </a:extLst>
+          </p:cNvPr>
+          <p:cNvCxnSpPr>
+            <a:cxnSpLocks/>
+            <a:stCxn id="8" idx="4"/>
+            <a:endCxn id="7" idx="0"/>
+          </p:cNvCxnSpPr>
+          <p:nvPr/>
+        </p:nvCxnSpPr>
+        <p:spPr>
+          <a:xfrm>
+            <a:off x="4914849" y="2548208"/>
+            <a:ext cx="0" cy="331872"/>
+          </a:xfrm>
+          <a:prstGeom prst="straightConnector1">
+            <a:avLst/>
+          </a:prstGeom>
+          <a:ln>
+            <a:tailEnd type="triangle"/>
+          </a:ln>
+        </p:spPr>
+        <p:style>
+          <a:lnRef idx="2">
+            <a:schemeClr val="accent1"/>
+          </a:lnRef>
+          <a:fillRef idx="0">
+            <a:schemeClr val="accent1"/>
+          </a:fillRef>
+          <a:effectRef idx="1">
+            <a:schemeClr val="accent1"/>
+          </a:effectRef>
+          <a:fontRef idx="minor">
+            <a:schemeClr val="tx1"/>
+          </a:fontRef>
+        </p:style>
+      </p:cxnSp>
+      <p:cxnSp>
+        <p:nvCxnSpPr>
+          <p:cNvPr id="79" name="직선 화살표 연결선 78">
+            <a:extLst>
+              <a:ext uri="{FF2B5EF4-FFF2-40B4-BE49-F238E27FC236}">
+                <a16:creationId xmlns:a16="http://schemas.microsoft.com/office/drawing/2014/main" id="{AF0EE38D-B3B9-6D60-CA5E-10D00244F492}"/>
+              </a:ext>
+            </a:extLst>
+          </p:cNvPr>
+          <p:cNvCxnSpPr>
+            <a:cxnSpLocks/>
+          </p:cNvCxnSpPr>
+          <p:nvPr/>
+        </p:nvCxnSpPr>
+        <p:spPr>
+          <a:xfrm>
+            <a:off x="6997934" y="1680331"/>
+            <a:ext cx="0" cy="331872"/>
+          </a:xfrm>
+          <a:prstGeom prst="straightConnector1">
+            <a:avLst/>
+          </a:prstGeom>
+          <a:ln>
+            <a:tailEnd type="triangle"/>
+          </a:ln>
+        </p:spPr>
+        <p:style>
+          <a:lnRef idx="2">
+            <a:schemeClr val="accent1"/>
+          </a:lnRef>
+          <a:fillRef idx="0">
+            <a:schemeClr val="accent1"/>
+          </a:fillRef>
+          <a:effectRef idx="1">
+            <a:schemeClr val="accent1"/>
+          </a:effectRef>
+          <a:fontRef idx="minor">
+            <a:schemeClr val="tx1"/>
+          </a:fontRef>
+        </p:style>
+      </p:cxnSp>
+      <p:cxnSp>
+        <p:nvCxnSpPr>
+          <p:cNvPr id="81" name="직선 화살표 연결선 80">
+            <a:extLst>
+              <a:ext uri="{FF2B5EF4-FFF2-40B4-BE49-F238E27FC236}">
+                <a16:creationId xmlns:a16="http://schemas.microsoft.com/office/drawing/2014/main" id="{AD5EEC74-4229-E26D-2E47-1DA2DBE4100E}"/>
+              </a:ext>
+            </a:extLst>
+          </p:cNvPr>
+          <p:cNvCxnSpPr>
+            <a:cxnSpLocks/>
+          </p:cNvCxnSpPr>
+          <p:nvPr/>
+        </p:nvCxnSpPr>
+        <p:spPr>
+          <a:xfrm>
+            <a:off x="6997934" y="4221688"/>
+            <a:ext cx="0" cy="331872"/>
+          </a:xfrm>
+          <a:prstGeom prst="straightConnector1">
+            <a:avLst/>
+          </a:prstGeom>
+          <a:ln>
+            <a:tailEnd type="triangle"/>
+          </a:ln>
+        </p:spPr>
+        <p:style>
+          <a:lnRef idx="2">
+            <a:schemeClr val="accent1"/>
+          </a:lnRef>
+          <a:fillRef idx="0">
+            <a:schemeClr val="accent1"/>
+          </a:fillRef>
+          <a:effectRef idx="1">
+            <a:schemeClr val="accent1"/>
+          </a:effectRef>
+          <a:fontRef idx="minor">
+            <a:schemeClr val="tx1"/>
+          </a:fontRef>
+        </p:style>
+      </p:cxnSp>
+      <p:cxnSp>
+        <p:nvCxnSpPr>
+          <p:cNvPr id="83" name="직선 화살표 연결선 82">
+            <a:extLst>
+              <a:ext uri="{FF2B5EF4-FFF2-40B4-BE49-F238E27FC236}">
+                <a16:creationId xmlns:a16="http://schemas.microsoft.com/office/drawing/2014/main" id="{65D0671C-97FE-CA5E-55C1-2BA27610F5E7}"/>
+              </a:ext>
+            </a:extLst>
+          </p:cNvPr>
+          <p:cNvCxnSpPr>
+            <a:cxnSpLocks/>
+          </p:cNvCxnSpPr>
+          <p:nvPr/>
+        </p:nvCxnSpPr>
+        <p:spPr>
+          <a:xfrm>
+            <a:off x="6997934" y="3374569"/>
+            <a:ext cx="0" cy="331872"/>
+          </a:xfrm>
+          <a:prstGeom prst="straightConnector1">
+            <a:avLst/>
+          </a:prstGeom>
+          <a:ln>
+            <a:tailEnd type="triangle"/>
+          </a:ln>
+        </p:spPr>
+        <p:style>
+          <a:lnRef idx="2">
+            <a:schemeClr val="accent1"/>
+          </a:lnRef>
+          <a:fillRef idx="0">
+            <a:schemeClr val="accent1"/>
+          </a:fillRef>
+          <a:effectRef idx="1">
+            <a:schemeClr val="accent1"/>
+          </a:effectRef>
+          <a:fontRef idx="minor">
+            <a:schemeClr val="tx1"/>
+          </a:fontRef>
+        </p:style>
+      </p:cxnSp>
+      <p:cxnSp>
+        <p:nvCxnSpPr>
+          <p:cNvPr id="85" name="직선 화살표 연결선 84">
+            <a:extLst>
+              <a:ext uri="{FF2B5EF4-FFF2-40B4-BE49-F238E27FC236}">
+                <a16:creationId xmlns:a16="http://schemas.microsoft.com/office/drawing/2014/main" id="{6571B6AF-0BCF-5D21-A8D7-DA8068F4D75E}"/>
+              </a:ext>
+            </a:extLst>
+          </p:cNvPr>
+          <p:cNvCxnSpPr>
+            <a:cxnSpLocks/>
+          </p:cNvCxnSpPr>
+          <p:nvPr/>
+        </p:nvCxnSpPr>
+        <p:spPr>
+          <a:xfrm>
+            <a:off x="6997934" y="2527450"/>
+            <a:ext cx="0" cy="331872"/>
+          </a:xfrm>
+          <a:prstGeom prst="straightConnector1">
+            <a:avLst/>
+          </a:prstGeom>
+          <a:ln>
+            <a:tailEnd type="triangle"/>
+          </a:ln>
+        </p:spPr>
+        <p:style>
+          <a:lnRef idx="2">
+            <a:schemeClr val="accent1"/>
+          </a:lnRef>
+          <a:fillRef idx="0">
+            <a:schemeClr val="accent1"/>
+          </a:fillRef>
+          <a:effectRef idx="1">
+            <a:schemeClr val="accent1"/>
+          </a:effectRef>
+          <a:fontRef idx="minor">
+            <a:schemeClr val="tx1"/>
+          </a:fontRef>
+        </p:style>
+      </p:cxnSp>
+      <p:cxnSp>
+        <p:nvCxnSpPr>
+          <p:cNvPr id="86" name="직선 화살표 연결선 85">
+            <a:extLst>
+              <a:ext uri="{FF2B5EF4-FFF2-40B4-BE49-F238E27FC236}">
+                <a16:creationId xmlns:a16="http://schemas.microsoft.com/office/drawing/2014/main" id="{794FBFCA-77E0-811B-F2BA-4B62A8929746}"/>
+              </a:ext>
+            </a:extLst>
+          </p:cNvPr>
+          <p:cNvCxnSpPr>
+            <a:cxnSpLocks/>
+          </p:cNvCxnSpPr>
+          <p:nvPr/>
+        </p:nvCxnSpPr>
+        <p:spPr>
+          <a:xfrm>
+            <a:off x="6997934" y="5068807"/>
+            <a:ext cx="0" cy="331872"/>
+          </a:xfrm>
+          <a:prstGeom prst="straightConnector1">
+            <a:avLst/>
+          </a:prstGeom>
+          <a:ln>
+            <a:tailEnd type="triangle"/>
+          </a:ln>
+        </p:spPr>
+        <p:style>
+          <a:lnRef idx="2">
+            <a:schemeClr val="accent1"/>
+          </a:lnRef>
+          <a:fillRef idx="0">
+            <a:schemeClr val="accent1"/>
+          </a:fillRef>
+          <a:effectRef idx="1">
+            <a:schemeClr val="accent1"/>
+          </a:effectRef>
+          <a:fontRef idx="minor">
+            <a:schemeClr val="tx1"/>
+          </a:fontRef>
+        </p:style>
+      </p:cxnSp>
+      <p:cxnSp>
+        <p:nvCxnSpPr>
+          <p:cNvPr id="87" name="연결선: 꺾임 86">
+            <a:extLst>
+              <a:ext uri="{FF2B5EF4-FFF2-40B4-BE49-F238E27FC236}">
+                <a16:creationId xmlns:a16="http://schemas.microsoft.com/office/drawing/2014/main" id="{67FBAA60-CAE9-4F7F-17EA-11D3704B498B}"/>
+              </a:ext>
+            </a:extLst>
+          </p:cNvPr>
+          <p:cNvCxnSpPr>
+            <a:cxnSpLocks/>
+            <a:stCxn id="18" idx="1"/>
+            <a:endCxn id="7" idx="2"/>
+          </p:cNvCxnSpPr>
+          <p:nvPr/>
+        </p:nvCxnSpPr>
+        <p:spPr>
+          <a:xfrm rot="10800000">
+            <a:off x="4914849" y="3384752"/>
+            <a:ext cx="1520948" cy="2272847"/>
+          </a:xfrm>
+          <a:prstGeom prst="bentConnector2">
+            <a:avLst/>
+          </a:prstGeom>
+          <a:ln>
+            <a:tailEnd type="triangle"/>
+          </a:ln>
+        </p:spPr>
+        <p:style>
+          <a:lnRef idx="2">
+            <a:schemeClr val="accent1"/>
+          </a:lnRef>
+          <a:fillRef idx="0">
+            <a:schemeClr val="accent1"/>
+          </a:fillRef>
+          <a:effectRef idx="1">
+            <a:schemeClr val="accent1"/>
+          </a:effectRef>
+          <a:fontRef idx="minor">
+            <a:schemeClr val="tx1"/>
+          </a:fontRef>
+        </p:style>
+      </p:cxnSp>
+      <p:cxnSp>
+        <p:nvCxnSpPr>
+          <p:cNvPr id="106" name="연결선: 꺾임 105">
+            <a:extLst>
+              <a:ext uri="{FF2B5EF4-FFF2-40B4-BE49-F238E27FC236}">
+                <a16:creationId xmlns:a16="http://schemas.microsoft.com/office/drawing/2014/main" id="{EEED5EFB-EC96-FF9F-3045-B4C2F3C30795}"/>
+              </a:ext>
+            </a:extLst>
+          </p:cNvPr>
+          <p:cNvCxnSpPr>
+            <a:cxnSpLocks/>
+            <a:stCxn id="46" idx="1"/>
+          </p:cNvCxnSpPr>
+          <p:nvPr/>
+        </p:nvCxnSpPr>
+        <p:spPr>
+          <a:xfrm rot="10800000" flipV="1">
+            <a:off x="5936995" y="4811183"/>
+            <a:ext cx="498803" cy="846415"/>
+          </a:xfrm>
+          <a:prstGeom prst="bentConnector2">
+            <a:avLst/>
+          </a:prstGeom>
+          <a:ln>
+            <a:tailEnd type="triangle"/>
+          </a:ln>
+        </p:spPr>
+        <p:style>
+          <a:lnRef idx="2">
+            <a:schemeClr val="accent1"/>
+          </a:lnRef>
+          <a:fillRef idx="0">
+            <a:schemeClr val="accent1"/>
+          </a:fillRef>
+          <a:effectRef idx="1">
+            <a:schemeClr val="accent1"/>
+          </a:effectRef>
+          <a:fontRef idx="minor">
+            <a:schemeClr val="tx1"/>
+          </a:fontRef>
+        </p:style>
+      </p:cxnSp>
     </p:spTree>
     <p:extLst>
       <p:ext uri="{BB962C8B-B14F-4D97-AF65-F5344CB8AC3E}">
-        <p14:creationId xmlns:p14="http://schemas.microsoft.com/office/powerpoint/2010/main" val="2065289591"/>
+        <p14:creationId xmlns:p14="http://schemas.microsoft.com/office/powerpoint/2010/main" val="603301169"/>
       </p:ext>
     </p:extLst>
   </p:cSld>
@@ -3827,7 +4791,13 @@
   <p:cSld>
     <p:spTree>
       <p:nvGrpSpPr>
-        <p:cNvPr id="1" name=""/>
+        <p:cNvPr id="1" name="">
+          <a:extLst>
+            <a:ext uri="{FF2B5EF4-FFF2-40B4-BE49-F238E27FC236}">
+              <a16:creationId xmlns:a16="http://schemas.microsoft.com/office/drawing/2014/main" id="{D3FAD8F9-6419-B913-8C6B-EB78393A8883}"/>
+            </a:ext>
+          </a:extLst>
+        </p:cNvPr>
         <p:cNvGrpSpPr/>
         <p:nvPr/>
       </p:nvGrpSpPr>
@@ -3841,90 +4811,10 @@
       </p:grpSpPr>
       <p:sp>
         <p:nvSpPr>
-          <p:cNvPr id="2" name="제목 1">
-            <a:extLst>
-              <a:ext uri="{FF2B5EF4-FFF2-40B4-BE49-F238E27FC236}">
-                <a16:creationId xmlns:a16="http://schemas.microsoft.com/office/drawing/2014/main" id="{B4AD78F3-413A-9E7E-B040-4FE9A9699E94}"/>
-              </a:ext>
-            </a:extLst>
-          </p:cNvPr>
-          <p:cNvSpPr>
-            <a:spLocks noGrp="1"/>
-          </p:cNvSpPr>
-          <p:nvPr>
-            <p:ph type="title"/>
-          </p:nvPr>
-        </p:nvSpPr>
-        <p:spPr/>
-        <p:txBody>
-          <a:bodyPr/>
-          <a:lstStyle/>
-          <a:p>
-            <a:endParaRPr lang="ko-KR" altLang="en-US"/>
-          </a:p>
-        </p:txBody>
-      </p:sp>
-      <p:sp>
-        <p:nvSpPr>
-          <p:cNvPr id="3" name="내용 개체 틀 2">
-            <a:extLst>
-              <a:ext uri="{FF2B5EF4-FFF2-40B4-BE49-F238E27FC236}">
-                <a16:creationId xmlns:a16="http://schemas.microsoft.com/office/drawing/2014/main" id="{47669DBA-076E-C756-9E3A-F0E55A343161}"/>
-              </a:ext>
-            </a:extLst>
-          </p:cNvPr>
-          <p:cNvSpPr>
-            <a:spLocks noGrp="1"/>
-          </p:cNvSpPr>
-          <p:nvPr>
-            <p:ph idx="1"/>
-          </p:nvPr>
-        </p:nvSpPr>
-        <p:spPr/>
-        <p:txBody>
-          <a:bodyPr/>
-          <a:lstStyle/>
-          <a:p>
-            <a:endParaRPr lang="ko-KR" altLang="en-US"/>
-          </a:p>
-        </p:txBody>
-      </p:sp>
-    </p:spTree>
-    <p:extLst>
-      <p:ext uri="{BB962C8B-B14F-4D97-AF65-F5344CB8AC3E}">
-        <p14:creationId xmlns:p14="http://schemas.microsoft.com/office/powerpoint/2010/main" val="24837856"/>
-      </p:ext>
-    </p:extLst>
-  </p:cSld>
-  <p:clrMapOvr>
-    <a:masterClrMapping/>
-  </p:clrMapOvr>
-</p:sld>
-</file>
-
-<file path=ppt/slides/slide3.xml><?xml version="1.0" encoding="utf-8"?>
-<p:sld xmlns:a="http://schemas.openxmlformats.org/drawingml/2006/main" xmlns:r="http://schemas.openxmlformats.org/officeDocument/2006/relationships" xmlns:p="http://schemas.openxmlformats.org/presentationml/2006/main">
-  <p:cSld>
-    <p:spTree>
-      <p:nvGrpSpPr>
-        <p:cNvPr id="1" name=""/>
-        <p:cNvGrpSpPr/>
-        <p:nvPr/>
-      </p:nvGrpSpPr>
-      <p:grpSpPr>
-        <a:xfrm>
-          <a:off x="0" y="0"/>
-          <a:ext cx="0" cy="0"/>
-          <a:chOff x="0" y="0"/>
-          <a:chExt cx="0" cy="0"/>
-        </a:xfrm>
-      </p:grpSpPr>
-      <p:sp>
-        <p:nvSpPr>
           <p:cNvPr id="4" name="순서도: 수행의 시작/종료 3">
             <a:extLst>
               <a:ext uri="{FF2B5EF4-FFF2-40B4-BE49-F238E27FC236}">
-                <a16:creationId xmlns:a16="http://schemas.microsoft.com/office/drawing/2014/main" id="{50675B92-5E11-1E62-906D-2ADD913AF468}"/>
+                <a16:creationId xmlns:a16="http://schemas.microsoft.com/office/drawing/2014/main" id="{BD2D60F7-B29E-FC9F-39D4-B6C0F64D5E0B}"/>
               </a:ext>
             </a:extLst>
           </p:cNvPr>
@@ -3971,7 +4861,7 @@
           <p:cNvPr id="10" name="순서도: 처리 9">
             <a:extLst>
               <a:ext uri="{FF2B5EF4-FFF2-40B4-BE49-F238E27FC236}">
-                <a16:creationId xmlns:a16="http://schemas.microsoft.com/office/drawing/2014/main" id="{F81FE58C-82D6-FDF3-664F-B80A0C4F93A2}"/>
+                <a16:creationId xmlns:a16="http://schemas.microsoft.com/office/drawing/2014/main" id="{CDD035CF-9891-AF27-F087-A1A7A928C774}"/>
               </a:ext>
             </a:extLst>
           </p:cNvPr>
@@ -4020,7 +4910,7 @@
           <p:cNvPr id="12" name="순서도: 처리 11">
             <a:extLst>
               <a:ext uri="{FF2B5EF4-FFF2-40B4-BE49-F238E27FC236}">
-                <a16:creationId xmlns:a16="http://schemas.microsoft.com/office/drawing/2014/main" id="{0ABD37BE-A572-BE7D-73FE-36C49D2F7754}"/>
+                <a16:creationId xmlns:a16="http://schemas.microsoft.com/office/drawing/2014/main" id="{ECACD959-F9D8-F9A4-E3BE-392D4DAA0656}"/>
               </a:ext>
             </a:extLst>
           </p:cNvPr>
@@ -4069,7 +4959,7 @@
           <p:cNvPr id="13" name="순서도: 자기 디스크 12">
             <a:extLst>
               <a:ext uri="{FF2B5EF4-FFF2-40B4-BE49-F238E27FC236}">
-                <a16:creationId xmlns:a16="http://schemas.microsoft.com/office/drawing/2014/main" id="{C455779E-0261-68BC-DA35-EADDC217B6E7}"/>
+                <a16:creationId xmlns:a16="http://schemas.microsoft.com/office/drawing/2014/main" id="{ACD215FC-91A8-61C6-2F52-FBF11B270535}"/>
               </a:ext>
             </a:extLst>
           </p:cNvPr>
@@ -4119,7 +5009,7 @@
           <p:cNvPr id="17" name="순서도: 수행의 시작/종료 16">
             <a:extLst>
               <a:ext uri="{FF2B5EF4-FFF2-40B4-BE49-F238E27FC236}">
-                <a16:creationId xmlns:a16="http://schemas.microsoft.com/office/drawing/2014/main" id="{68E0B567-1A7C-78AA-11DF-E4902C437E63}"/>
+                <a16:creationId xmlns:a16="http://schemas.microsoft.com/office/drawing/2014/main" id="{555787FA-93FA-AD41-7E8B-C69EBECD0DD5}"/>
               </a:ext>
             </a:extLst>
           </p:cNvPr>
@@ -4166,7 +5056,7 @@
           <p:cNvPr id="19" name="순서도: 처리 18">
             <a:extLst>
               <a:ext uri="{FF2B5EF4-FFF2-40B4-BE49-F238E27FC236}">
-                <a16:creationId xmlns:a16="http://schemas.microsoft.com/office/drawing/2014/main" id="{19E3EED4-6CE6-8290-550C-3DF338AD77B0}"/>
+                <a16:creationId xmlns:a16="http://schemas.microsoft.com/office/drawing/2014/main" id="{B5A8F7A2-3679-DD2A-A0F8-81CE1C245CB5}"/>
               </a:ext>
             </a:extLst>
           </p:cNvPr>
@@ -4215,7 +5105,7 @@
           <p:cNvPr id="21" name="순서도: 처리 20">
             <a:extLst>
               <a:ext uri="{FF2B5EF4-FFF2-40B4-BE49-F238E27FC236}">
-                <a16:creationId xmlns:a16="http://schemas.microsoft.com/office/drawing/2014/main" id="{4DCDB954-EAA0-B4F6-1225-AF23555306EE}"/>
+                <a16:creationId xmlns:a16="http://schemas.microsoft.com/office/drawing/2014/main" id="{3A83AA76-E8B0-1080-F360-9DF5756DE42C}"/>
               </a:ext>
             </a:extLst>
           </p:cNvPr>
@@ -4264,7 +5154,7 @@
           <p:cNvPr id="25" name="연결선: 꺾임 24">
             <a:extLst>
               <a:ext uri="{FF2B5EF4-FFF2-40B4-BE49-F238E27FC236}">
-                <a16:creationId xmlns:a16="http://schemas.microsoft.com/office/drawing/2014/main" id="{884A62E8-E15C-3009-A394-16B879B4516C}"/>
+                <a16:creationId xmlns:a16="http://schemas.microsoft.com/office/drawing/2014/main" id="{EC62E72D-23F3-ECA4-45EF-DDB80132F38D}"/>
               </a:ext>
             </a:extLst>
           </p:cNvPr>
@@ -4309,7 +5199,7 @@
           <p:cNvPr id="28" name="순서도: 문서 27">
             <a:extLst>
               <a:ext uri="{FF2B5EF4-FFF2-40B4-BE49-F238E27FC236}">
-                <a16:creationId xmlns:a16="http://schemas.microsoft.com/office/drawing/2014/main" id="{BE48BB8C-EF32-59B8-0301-D5B7D5A54644}"/>
+                <a16:creationId xmlns:a16="http://schemas.microsoft.com/office/drawing/2014/main" id="{B0FAA347-B69A-5938-8924-D4C0EEBF46D0}"/>
               </a:ext>
             </a:extLst>
           </p:cNvPr>
@@ -4358,7 +5248,7 @@
           <p:cNvPr id="31" name="직선 화살표 연결선 30">
             <a:extLst>
               <a:ext uri="{FF2B5EF4-FFF2-40B4-BE49-F238E27FC236}">
-                <a16:creationId xmlns:a16="http://schemas.microsoft.com/office/drawing/2014/main" id="{2A1A61BC-B0A9-1B60-D3B1-9F85FF0613A0}"/>
+                <a16:creationId xmlns:a16="http://schemas.microsoft.com/office/drawing/2014/main" id="{7DCAB58E-3B91-92AC-20E5-528E35E4D546}"/>
               </a:ext>
             </a:extLst>
           </p:cNvPr>
@@ -4400,7 +5290,7 @@
           <p:cNvPr id="36" name="순서도: 수행의 시작/종료 35">
             <a:extLst>
               <a:ext uri="{FF2B5EF4-FFF2-40B4-BE49-F238E27FC236}">
-                <a16:creationId xmlns:a16="http://schemas.microsoft.com/office/drawing/2014/main" id="{6B565727-D09C-9189-B225-19C78489CAA2}"/>
+                <a16:creationId xmlns:a16="http://schemas.microsoft.com/office/drawing/2014/main" id="{13C73C80-9D82-2E5C-603A-C2DD3626977A}"/>
               </a:ext>
             </a:extLst>
           </p:cNvPr>
@@ -4447,7 +5337,7 @@
           <p:cNvPr id="38" name="순서도: 처리 37">
             <a:extLst>
               <a:ext uri="{FF2B5EF4-FFF2-40B4-BE49-F238E27FC236}">
-                <a16:creationId xmlns:a16="http://schemas.microsoft.com/office/drawing/2014/main" id="{68B63908-66F6-0BB3-618C-02EB39E031E6}"/>
+                <a16:creationId xmlns:a16="http://schemas.microsoft.com/office/drawing/2014/main" id="{AD231897-BCF1-F2AF-0580-C30C50FF2D9C}"/>
               </a:ext>
             </a:extLst>
           </p:cNvPr>
@@ -4496,7 +5386,7 @@
           <p:cNvPr id="40" name="순서도: 처리 39">
             <a:extLst>
               <a:ext uri="{FF2B5EF4-FFF2-40B4-BE49-F238E27FC236}">
-                <a16:creationId xmlns:a16="http://schemas.microsoft.com/office/drawing/2014/main" id="{5A26EE99-C683-23BA-A6DA-ACAE019186FA}"/>
+                <a16:creationId xmlns:a16="http://schemas.microsoft.com/office/drawing/2014/main" id="{20D1CAE1-B106-CDF9-3C77-46746FD25493}"/>
               </a:ext>
             </a:extLst>
           </p:cNvPr>
@@ -4545,7 +5435,7 @@
           <p:cNvPr id="42" name="순서도: 문서 41">
             <a:extLst>
               <a:ext uri="{FF2B5EF4-FFF2-40B4-BE49-F238E27FC236}">
-                <a16:creationId xmlns:a16="http://schemas.microsoft.com/office/drawing/2014/main" id="{8B20984B-09BC-DA41-4A79-EEC324EC639B}"/>
+                <a16:creationId xmlns:a16="http://schemas.microsoft.com/office/drawing/2014/main" id="{4E632E29-8B46-0249-9445-9E042FC9387C}"/>
               </a:ext>
             </a:extLst>
           </p:cNvPr>
@@ -4594,7 +5484,7 @@
           <p:cNvPr id="44" name="연결선: 꺾임 43">
             <a:extLst>
               <a:ext uri="{FF2B5EF4-FFF2-40B4-BE49-F238E27FC236}">
-                <a16:creationId xmlns:a16="http://schemas.microsoft.com/office/drawing/2014/main" id="{2585CBCF-3937-52B2-B6B9-87CB3CF76F2F}"/>
+                <a16:creationId xmlns:a16="http://schemas.microsoft.com/office/drawing/2014/main" id="{A6A73A60-9E68-8344-ADD7-F65B7E14968F}"/>
               </a:ext>
             </a:extLst>
           </p:cNvPr>
@@ -4639,7 +5529,7 @@
           <p:cNvPr id="49" name="순서도: 처리 48">
             <a:extLst>
               <a:ext uri="{FF2B5EF4-FFF2-40B4-BE49-F238E27FC236}">
-                <a16:creationId xmlns:a16="http://schemas.microsoft.com/office/drawing/2014/main" id="{813492DB-A618-B574-1B44-74037621C1D6}"/>
+                <a16:creationId xmlns:a16="http://schemas.microsoft.com/office/drawing/2014/main" id="{52D5856F-386E-6927-8205-268F0E9C49A7}"/>
               </a:ext>
             </a:extLst>
           </p:cNvPr>
@@ -4688,7 +5578,7 @@
           <p:cNvPr id="52" name="순서도: 판단 51">
             <a:extLst>
               <a:ext uri="{FF2B5EF4-FFF2-40B4-BE49-F238E27FC236}">
-                <a16:creationId xmlns:a16="http://schemas.microsoft.com/office/drawing/2014/main" id="{EBD20533-7290-60F4-E02E-814694A4ADC9}"/>
+                <a16:creationId xmlns:a16="http://schemas.microsoft.com/office/drawing/2014/main" id="{C43E3E06-1EE6-B5F7-FCC7-E21784D235AE}"/>
               </a:ext>
             </a:extLst>
           </p:cNvPr>
@@ -4737,7 +5627,7 @@
           <p:cNvPr id="57" name="순서도: 수행의 시작/종료 56">
             <a:extLst>
               <a:ext uri="{FF2B5EF4-FFF2-40B4-BE49-F238E27FC236}">
-                <a16:creationId xmlns:a16="http://schemas.microsoft.com/office/drawing/2014/main" id="{9D0A656E-AC99-CB5E-8289-E279E0C6F00E}"/>
+                <a16:creationId xmlns:a16="http://schemas.microsoft.com/office/drawing/2014/main" id="{F9438F5C-0165-221D-2C74-56E4229445E0}"/>
               </a:ext>
             </a:extLst>
           </p:cNvPr>
@@ -4784,7 +5674,7 @@
           <p:cNvPr id="63" name="연결선: 꺾임 62">
             <a:extLst>
               <a:ext uri="{FF2B5EF4-FFF2-40B4-BE49-F238E27FC236}">
-                <a16:creationId xmlns:a16="http://schemas.microsoft.com/office/drawing/2014/main" id="{28FAEABF-DFAE-704F-C20E-32EAA4A4004E}"/>
+                <a16:creationId xmlns:a16="http://schemas.microsoft.com/office/drawing/2014/main" id="{7F151321-3A4E-F1D8-2F7D-DB0E117A4530}"/>
               </a:ext>
             </a:extLst>
           </p:cNvPr>
@@ -4828,7 +5718,7 @@
           <p:cNvPr id="67" name="순서도: 처리 66">
             <a:extLst>
               <a:ext uri="{FF2B5EF4-FFF2-40B4-BE49-F238E27FC236}">
-                <a16:creationId xmlns:a16="http://schemas.microsoft.com/office/drawing/2014/main" id="{8CA37D40-4DD2-B296-F817-777E4CFC88F8}"/>
+                <a16:creationId xmlns:a16="http://schemas.microsoft.com/office/drawing/2014/main" id="{DF1BFBB3-03D1-9C85-2FF3-8E9AEA917471}"/>
               </a:ext>
             </a:extLst>
           </p:cNvPr>
@@ -4877,7 +5767,7 @@
           <p:cNvPr id="70" name="순서도: 판단 69">
             <a:extLst>
               <a:ext uri="{FF2B5EF4-FFF2-40B4-BE49-F238E27FC236}">
-                <a16:creationId xmlns:a16="http://schemas.microsoft.com/office/drawing/2014/main" id="{DF18AB5C-AEAA-8143-2CC1-0DD6D21AD5CC}"/>
+                <a16:creationId xmlns:a16="http://schemas.microsoft.com/office/drawing/2014/main" id="{2B5AE194-92B3-D880-1C5A-A4EEB0E65435}"/>
               </a:ext>
             </a:extLst>
           </p:cNvPr>
@@ -4926,7 +5816,7 @@
           <p:cNvPr id="72" name="순서도: 판단 71">
             <a:extLst>
               <a:ext uri="{FF2B5EF4-FFF2-40B4-BE49-F238E27FC236}">
-                <a16:creationId xmlns:a16="http://schemas.microsoft.com/office/drawing/2014/main" id="{B91B2348-0E7D-74B4-C6E5-A07A70FCD1BC}"/>
+                <a16:creationId xmlns:a16="http://schemas.microsoft.com/office/drawing/2014/main" id="{ED7B0326-A14D-4A90-A14E-66F21E8A4B60}"/>
               </a:ext>
             </a:extLst>
           </p:cNvPr>
@@ -4975,7 +5865,7 @@
           <p:cNvPr id="74" name="순서도: 판단 73">
             <a:extLst>
               <a:ext uri="{FF2B5EF4-FFF2-40B4-BE49-F238E27FC236}">
-                <a16:creationId xmlns:a16="http://schemas.microsoft.com/office/drawing/2014/main" id="{2146E555-BD90-3B46-D36D-559CCFBCA7DD}"/>
+                <a16:creationId xmlns:a16="http://schemas.microsoft.com/office/drawing/2014/main" id="{ABF43763-1782-51D1-0A63-3CA2D5B7B592}"/>
               </a:ext>
             </a:extLst>
           </p:cNvPr>
@@ -5024,7 +5914,7 @@
           <p:cNvPr id="80" name="순서도: 처리 79">
             <a:extLst>
               <a:ext uri="{FF2B5EF4-FFF2-40B4-BE49-F238E27FC236}">
-                <a16:creationId xmlns:a16="http://schemas.microsoft.com/office/drawing/2014/main" id="{73C50483-F6F8-13AD-E672-DED1D554EAB3}"/>
+                <a16:creationId xmlns:a16="http://schemas.microsoft.com/office/drawing/2014/main" id="{C22BD210-C407-07F9-34F9-6D10E5837EB0}"/>
               </a:ext>
             </a:extLst>
           </p:cNvPr>
@@ -5073,7 +5963,7 @@
           <p:cNvPr id="82" name="순서도: 문서 81">
             <a:extLst>
               <a:ext uri="{FF2B5EF4-FFF2-40B4-BE49-F238E27FC236}">
-                <a16:creationId xmlns:a16="http://schemas.microsoft.com/office/drawing/2014/main" id="{4427AD71-5906-A4F3-5F63-635C2B901C59}"/>
+                <a16:creationId xmlns:a16="http://schemas.microsoft.com/office/drawing/2014/main" id="{CE607AC4-7E86-78FB-2142-34A338FAF273}"/>
               </a:ext>
             </a:extLst>
           </p:cNvPr>
@@ -5122,7 +6012,7 @@
           <p:cNvPr id="84" name="순서도: 자기 디스크 83">
             <a:extLst>
               <a:ext uri="{FF2B5EF4-FFF2-40B4-BE49-F238E27FC236}">
-                <a16:creationId xmlns:a16="http://schemas.microsoft.com/office/drawing/2014/main" id="{E4DDE04C-A29D-1277-B381-2B29B18F1AD8}"/>
+                <a16:creationId xmlns:a16="http://schemas.microsoft.com/office/drawing/2014/main" id="{66F76B0F-1F1C-04CE-0299-D25820478E92}"/>
               </a:ext>
             </a:extLst>
           </p:cNvPr>
@@ -5170,7 +6060,7 @@
     </p:spTree>
     <p:extLst>
       <p:ext uri="{BB962C8B-B14F-4D97-AF65-F5344CB8AC3E}">
-        <p14:creationId xmlns:p14="http://schemas.microsoft.com/office/powerpoint/2010/main" val="603301169"/>
+        <p14:creationId xmlns:p14="http://schemas.microsoft.com/office/powerpoint/2010/main" val="1024987015"/>
       </p:ext>
     </p:extLst>
   </p:cSld>

--- a/플로우차트.pptx
+++ b/플로우차트.pptx
@@ -4699,18 +4699,21 @@
           </p:cNvPr>
           <p:cNvCxnSpPr>
             <a:cxnSpLocks/>
-            <a:stCxn id="18" idx="1"/>
-            <a:endCxn id="7" idx="2"/>
+            <a:stCxn id="18" idx="2"/>
+            <a:endCxn id="8" idx="2"/>
           </p:cNvCxnSpPr>
           <p:nvPr/>
         </p:nvCxnSpPr>
         <p:spPr>
-          <a:xfrm rot="10800000">
-            <a:off x="4914849" y="3384752"/>
-            <a:ext cx="1520948" cy="2272847"/>
-          </a:xfrm>
-          <a:prstGeom prst="bentConnector2">
-            <a:avLst/>
+          <a:xfrm rot="5400000" flipH="1">
+            <a:off x="3924861" y="2836152"/>
+            <a:ext cx="3613352" cy="2532795"/>
+          </a:xfrm>
+          <a:prstGeom prst="bentConnector4">
+            <a:avLst>
+              <a:gd name="adj1" fmla="val -6327"/>
+              <a:gd name="adj2" fmla="val 113464"/>
+            </a:avLst>
           </a:prstGeom>
           <a:ln>
             <a:tailEnd type="triangle"/>
@@ -4748,8 +4751,8 @@
         </p:nvCxnSpPr>
         <p:spPr>
           <a:xfrm rot="10800000" flipV="1">
-            <a:off x="5936995" y="4811183"/>
-            <a:ext cx="498803" cy="846415"/>
+            <a:off x="6050213" y="4811184"/>
+            <a:ext cx="385584" cy="1345088"/>
           </a:xfrm>
           <a:prstGeom prst="bentConnector2">
             <a:avLst/>
@@ -4773,6 +4776,459 @@
           </a:fontRef>
         </p:style>
       </p:cxnSp>
+      <p:sp>
+        <p:nvSpPr>
+          <p:cNvPr id="2" name="순서도: 처리 1">
+            <a:extLst>
+              <a:ext uri="{FF2B5EF4-FFF2-40B4-BE49-F238E27FC236}">
+                <a16:creationId xmlns:a16="http://schemas.microsoft.com/office/drawing/2014/main" id="{3BD95F6A-7C51-B54E-7CF6-7DD88844CD20}"/>
+              </a:ext>
+            </a:extLst>
+          </p:cNvPr>
+          <p:cNvSpPr/>
+          <p:nvPr/>
+        </p:nvSpPr>
+        <p:spPr>
+          <a:xfrm>
+            <a:off x="8219874" y="5400683"/>
+            <a:ext cx="1124274" cy="503254"/>
+          </a:xfrm>
+          <a:prstGeom prst="flowChartProcess">
+            <a:avLst/>
+          </a:prstGeom>
+        </p:spPr>
+        <p:style>
+          <a:lnRef idx="2">
+            <a:schemeClr val="accent1">
+              <a:shade val="15000"/>
+            </a:schemeClr>
+          </a:lnRef>
+          <a:fillRef idx="1">
+            <a:schemeClr val="accent1"/>
+          </a:fillRef>
+          <a:effectRef idx="0">
+            <a:schemeClr val="accent1"/>
+          </a:effectRef>
+          <a:fontRef idx="minor">
+            <a:schemeClr val="lt1"/>
+          </a:fontRef>
+        </p:style>
+        <p:txBody>
+          <a:bodyPr rtlCol="0" anchor="ctr"/>
+          <a:lstStyle/>
+          <a:p>
+            <a:pPr algn="ctr"/>
+            <a:r>
+              <a:rPr lang="ko-KR" altLang="en-US" sz="1200" dirty="0"/>
+              <a:t>예매 처리</a:t>
+            </a:r>
+          </a:p>
+        </p:txBody>
+      </p:sp>
+      <p:sp>
+        <p:nvSpPr>
+          <p:cNvPr id="3" name="순서도: 판단 2">
+            <a:extLst>
+              <a:ext uri="{FF2B5EF4-FFF2-40B4-BE49-F238E27FC236}">
+                <a16:creationId xmlns:a16="http://schemas.microsoft.com/office/drawing/2014/main" id="{85F3A852-1795-8FC2-11B8-48E3310EBACC}"/>
+              </a:ext>
+            </a:extLst>
+          </p:cNvPr>
+          <p:cNvSpPr/>
+          <p:nvPr/>
+        </p:nvSpPr>
+        <p:spPr>
+          <a:xfrm>
+            <a:off x="8219874" y="4553560"/>
+            <a:ext cx="1124274" cy="504671"/>
+          </a:xfrm>
+          <a:prstGeom prst="flowChartDecision">
+            <a:avLst/>
+          </a:prstGeom>
+        </p:spPr>
+        <p:style>
+          <a:lnRef idx="2">
+            <a:schemeClr val="accent1">
+              <a:shade val="15000"/>
+            </a:schemeClr>
+          </a:lnRef>
+          <a:fillRef idx="1">
+            <a:schemeClr val="accent1"/>
+          </a:fillRef>
+          <a:effectRef idx="0">
+            <a:schemeClr val="accent1"/>
+          </a:effectRef>
+          <a:fontRef idx="minor">
+            <a:schemeClr val="lt1"/>
+          </a:fontRef>
+        </p:style>
+        <p:txBody>
+          <a:bodyPr rtlCol="0" anchor="ctr"/>
+          <a:lstStyle/>
+          <a:p>
+            <a:pPr algn="ctr"/>
+            <a:r>
+              <a:rPr lang="ko-KR" altLang="en-US" sz="1400" dirty="0"/>
+              <a:t>확인</a:t>
+            </a:r>
+            <a:endParaRPr lang="en-US" altLang="ko-KR" sz="1400" dirty="0"/>
+          </a:p>
+        </p:txBody>
+      </p:sp>
+      <p:cxnSp>
+        <p:nvCxnSpPr>
+          <p:cNvPr id="11" name="직선 화살표 연결선 10">
+            <a:extLst>
+              <a:ext uri="{FF2B5EF4-FFF2-40B4-BE49-F238E27FC236}">
+                <a16:creationId xmlns:a16="http://schemas.microsoft.com/office/drawing/2014/main" id="{6234B009-903E-B9AC-ABD9-2968659206A5}"/>
+              </a:ext>
+            </a:extLst>
+          </p:cNvPr>
+          <p:cNvCxnSpPr>
+            <a:cxnSpLocks/>
+            <a:endCxn id="3" idx="0"/>
+          </p:cNvCxnSpPr>
+          <p:nvPr/>
+        </p:nvCxnSpPr>
+        <p:spPr>
+          <a:xfrm>
+            <a:off x="8782011" y="1675043"/>
+            <a:ext cx="0" cy="2878517"/>
+          </a:xfrm>
+          <a:prstGeom prst="straightConnector1">
+            <a:avLst/>
+          </a:prstGeom>
+          <a:ln>
+            <a:tailEnd type="triangle"/>
+          </a:ln>
+        </p:spPr>
+        <p:style>
+          <a:lnRef idx="2">
+            <a:schemeClr val="accent1"/>
+          </a:lnRef>
+          <a:fillRef idx="0">
+            <a:schemeClr val="accent1"/>
+          </a:fillRef>
+          <a:effectRef idx="1">
+            <a:schemeClr val="accent1"/>
+          </a:effectRef>
+          <a:fontRef idx="minor">
+            <a:schemeClr val="tx1"/>
+          </a:fontRef>
+        </p:style>
+      </p:cxnSp>
+      <p:cxnSp>
+        <p:nvCxnSpPr>
+          <p:cNvPr id="15" name="직선 화살표 연결선 14">
+            <a:extLst>
+              <a:ext uri="{FF2B5EF4-FFF2-40B4-BE49-F238E27FC236}">
+                <a16:creationId xmlns:a16="http://schemas.microsoft.com/office/drawing/2014/main" id="{1530A6FF-E2C3-40C4-3CC6-A2169588D8FF}"/>
+              </a:ext>
+            </a:extLst>
+          </p:cNvPr>
+          <p:cNvCxnSpPr>
+            <a:cxnSpLocks/>
+          </p:cNvCxnSpPr>
+          <p:nvPr/>
+        </p:nvCxnSpPr>
+        <p:spPr>
+          <a:xfrm>
+            <a:off x="8782011" y="5063519"/>
+            <a:ext cx="0" cy="331872"/>
+          </a:xfrm>
+          <a:prstGeom prst="straightConnector1">
+            <a:avLst/>
+          </a:prstGeom>
+          <a:ln>
+            <a:tailEnd type="triangle"/>
+          </a:ln>
+        </p:spPr>
+        <p:style>
+          <a:lnRef idx="2">
+            <a:schemeClr val="accent1"/>
+          </a:lnRef>
+          <a:fillRef idx="0">
+            <a:schemeClr val="accent1"/>
+          </a:fillRef>
+          <a:effectRef idx="1">
+            <a:schemeClr val="accent1"/>
+          </a:effectRef>
+          <a:fontRef idx="minor">
+            <a:schemeClr val="tx1"/>
+          </a:fontRef>
+        </p:style>
+      </p:cxnSp>
+      <p:cxnSp>
+        <p:nvCxnSpPr>
+          <p:cNvPr id="16" name="연결선: 꺾임 15">
+            <a:extLst>
+              <a:ext uri="{FF2B5EF4-FFF2-40B4-BE49-F238E27FC236}">
+                <a16:creationId xmlns:a16="http://schemas.microsoft.com/office/drawing/2014/main" id="{3BA0F029-2CAB-3E29-A2CB-E0A0D0F63771}"/>
+              </a:ext>
+            </a:extLst>
+          </p:cNvPr>
+          <p:cNvCxnSpPr>
+            <a:cxnSpLocks/>
+            <a:stCxn id="3" idx="1"/>
+          </p:cNvCxnSpPr>
+          <p:nvPr/>
+        </p:nvCxnSpPr>
+        <p:spPr>
+          <a:xfrm rot="10800000" flipV="1">
+            <a:off x="7832436" y="4805896"/>
+            <a:ext cx="387438" cy="1350376"/>
+          </a:xfrm>
+          <a:prstGeom prst="bentConnector2">
+            <a:avLst/>
+          </a:prstGeom>
+          <a:ln>
+            <a:tailEnd type="triangle"/>
+          </a:ln>
+        </p:spPr>
+        <p:style>
+          <a:lnRef idx="2">
+            <a:schemeClr val="accent1"/>
+          </a:lnRef>
+          <a:fillRef idx="0">
+            <a:schemeClr val="accent1"/>
+          </a:fillRef>
+          <a:effectRef idx="1">
+            <a:schemeClr val="accent1"/>
+          </a:effectRef>
+          <a:fontRef idx="minor">
+            <a:schemeClr val="tx1"/>
+          </a:fontRef>
+        </p:style>
+      </p:cxnSp>
+      <p:cxnSp>
+        <p:nvCxnSpPr>
+          <p:cNvPr id="17" name="연결선: 꺾임 16">
+            <a:extLst>
+              <a:ext uri="{FF2B5EF4-FFF2-40B4-BE49-F238E27FC236}">
+                <a16:creationId xmlns:a16="http://schemas.microsoft.com/office/drawing/2014/main" id="{265A1EC7-156E-61E8-E762-80CF3E9285AE}"/>
+              </a:ext>
+            </a:extLst>
+          </p:cNvPr>
+          <p:cNvCxnSpPr>
+            <a:cxnSpLocks/>
+            <a:stCxn id="7" idx="3"/>
+          </p:cNvCxnSpPr>
+          <p:nvPr/>
+        </p:nvCxnSpPr>
+        <p:spPr>
+          <a:xfrm flipV="1">
+            <a:off x="5476986" y="1165083"/>
+            <a:ext cx="3305025" cy="1967333"/>
+          </a:xfrm>
+          <a:prstGeom prst="bentConnector4">
+            <a:avLst>
+              <a:gd name="adj1" fmla="val 14388"/>
+              <a:gd name="adj2" fmla="val 111620"/>
+            </a:avLst>
+          </a:prstGeom>
+          <a:ln>
+            <a:tailEnd type="triangle"/>
+          </a:ln>
+        </p:spPr>
+        <p:style>
+          <a:lnRef idx="2">
+            <a:schemeClr val="accent1"/>
+          </a:lnRef>
+          <a:fillRef idx="0">
+            <a:schemeClr val="accent1"/>
+          </a:fillRef>
+          <a:effectRef idx="1">
+            <a:schemeClr val="accent1"/>
+          </a:effectRef>
+          <a:fontRef idx="minor">
+            <a:schemeClr val="tx1"/>
+          </a:fontRef>
+        </p:style>
+      </p:cxnSp>
+      <p:sp>
+        <p:nvSpPr>
+          <p:cNvPr id="23" name="순서도: 처리 22">
+            <a:extLst>
+              <a:ext uri="{FF2B5EF4-FFF2-40B4-BE49-F238E27FC236}">
+                <a16:creationId xmlns:a16="http://schemas.microsoft.com/office/drawing/2014/main" id="{D58112E3-5972-EE3F-3E87-E136435B3887}"/>
+              </a:ext>
+            </a:extLst>
+          </p:cNvPr>
+          <p:cNvSpPr/>
+          <p:nvPr/>
+        </p:nvSpPr>
+        <p:spPr>
+          <a:xfrm>
+            <a:off x="8219873" y="1166497"/>
+            <a:ext cx="1124274" cy="503254"/>
+          </a:xfrm>
+          <a:prstGeom prst="flowChartProcess">
+            <a:avLst/>
+          </a:prstGeom>
+        </p:spPr>
+        <p:style>
+          <a:lnRef idx="2">
+            <a:schemeClr val="accent1">
+              <a:shade val="15000"/>
+            </a:schemeClr>
+          </a:lnRef>
+          <a:fillRef idx="1">
+            <a:schemeClr val="accent1"/>
+          </a:fillRef>
+          <a:effectRef idx="0">
+            <a:schemeClr val="accent1"/>
+          </a:effectRef>
+          <a:fontRef idx="minor">
+            <a:schemeClr val="lt1"/>
+          </a:fontRef>
+        </p:style>
+        <p:txBody>
+          <a:bodyPr rtlCol="0" anchor="ctr"/>
+          <a:lstStyle/>
+          <a:p>
+            <a:pPr algn="ctr"/>
+            <a:r>
+              <a:rPr lang="ko-KR" altLang="en-US" sz="1200" dirty="0"/>
+              <a:t>예매 취소</a:t>
+            </a:r>
+          </a:p>
+        </p:txBody>
+      </p:sp>
+      <p:cxnSp>
+        <p:nvCxnSpPr>
+          <p:cNvPr id="25" name="연결선: 꺾임 24">
+            <a:extLst>
+              <a:ext uri="{FF2B5EF4-FFF2-40B4-BE49-F238E27FC236}">
+                <a16:creationId xmlns:a16="http://schemas.microsoft.com/office/drawing/2014/main" id="{BCD36329-BBF4-E8F3-0326-33505218B9D5}"/>
+              </a:ext>
+            </a:extLst>
+          </p:cNvPr>
+          <p:cNvCxnSpPr>
+            <a:cxnSpLocks/>
+            <a:stCxn id="2" idx="2"/>
+            <a:endCxn id="8" idx="2"/>
+          </p:cNvCxnSpPr>
+          <p:nvPr/>
+        </p:nvCxnSpPr>
+        <p:spPr>
+          <a:xfrm rot="5400000" flipH="1">
+            <a:off x="4819543" y="1941469"/>
+            <a:ext cx="3608064" cy="4316872"/>
+          </a:xfrm>
+          <a:prstGeom prst="bentConnector4">
+            <a:avLst>
+              <a:gd name="adj1" fmla="val -6336"/>
+              <a:gd name="adj2" fmla="val 107900"/>
+            </a:avLst>
+          </a:prstGeom>
+          <a:ln>
+            <a:tailEnd type="triangle"/>
+          </a:ln>
+        </p:spPr>
+        <p:style>
+          <a:lnRef idx="2">
+            <a:schemeClr val="accent1"/>
+          </a:lnRef>
+          <a:fillRef idx="0">
+            <a:schemeClr val="accent1"/>
+          </a:fillRef>
+          <a:effectRef idx="1">
+            <a:schemeClr val="accent1"/>
+          </a:effectRef>
+          <a:fontRef idx="minor">
+            <a:schemeClr val="tx1"/>
+          </a:fontRef>
+        </p:style>
+      </p:cxnSp>
+      <p:cxnSp>
+        <p:nvCxnSpPr>
+          <p:cNvPr id="9" name="직선 화살표 연결선 8">
+            <a:extLst>
+              <a:ext uri="{FF2B5EF4-FFF2-40B4-BE49-F238E27FC236}">
+                <a16:creationId xmlns:a16="http://schemas.microsoft.com/office/drawing/2014/main" id="{EBE35AD8-327C-7A55-87A6-0D6297ECEDAC}"/>
+              </a:ext>
+            </a:extLst>
+          </p:cNvPr>
+          <p:cNvCxnSpPr>
+            <a:cxnSpLocks/>
+            <a:stCxn id="7" idx="2"/>
+          </p:cNvCxnSpPr>
+          <p:nvPr/>
+        </p:nvCxnSpPr>
+        <p:spPr>
+          <a:xfrm>
+            <a:off x="4914849" y="3384751"/>
+            <a:ext cx="0" cy="512994"/>
+          </a:xfrm>
+          <a:prstGeom prst="straightConnector1">
+            <a:avLst/>
+          </a:prstGeom>
+          <a:ln>
+            <a:tailEnd type="triangle"/>
+          </a:ln>
+        </p:spPr>
+        <p:style>
+          <a:lnRef idx="2">
+            <a:schemeClr val="accent1"/>
+          </a:lnRef>
+          <a:fillRef idx="0">
+            <a:schemeClr val="accent1"/>
+          </a:fillRef>
+          <a:effectRef idx="1">
+            <a:schemeClr val="accent1"/>
+          </a:effectRef>
+          <a:fontRef idx="minor">
+            <a:schemeClr val="tx1"/>
+          </a:fontRef>
+        </p:style>
+      </p:cxnSp>
+      <p:sp>
+        <p:nvSpPr>
+          <p:cNvPr id="20" name="순서도: 수행의 시작/종료 19">
+            <a:extLst>
+              <a:ext uri="{FF2B5EF4-FFF2-40B4-BE49-F238E27FC236}">
+                <a16:creationId xmlns:a16="http://schemas.microsoft.com/office/drawing/2014/main" id="{275FDA37-61FB-6BC9-DB8F-DC9201415BA5}"/>
+              </a:ext>
+            </a:extLst>
+          </p:cNvPr>
+          <p:cNvSpPr/>
+          <p:nvPr/>
+        </p:nvSpPr>
+        <p:spPr>
+          <a:xfrm>
+            <a:off x="4255046" y="3888735"/>
+            <a:ext cx="1319606" cy="401145"/>
+          </a:xfrm>
+          <a:prstGeom prst="flowChartTerminator">
+            <a:avLst/>
+          </a:prstGeom>
+        </p:spPr>
+        <p:style>
+          <a:lnRef idx="1">
+            <a:schemeClr val="accent2"/>
+          </a:lnRef>
+          <a:fillRef idx="2">
+            <a:schemeClr val="accent2"/>
+          </a:fillRef>
+          <a:effectRef idx="1">
+            <a:schemeClr val="accent2"/>
+          </a:effectRef>
+          <a:fontRef idx="minor">
+            <a:schemeClr val="dk1"/>
+          </a:fontRef>
+        </p:style>
+        <p:txBody>
+          <a:bodyPr rtlCol="0" anchor="ctr"/>
+          <a:lstStyle/>
+          <a:p>
+            <a:pPr algn="ctr"/>
+            <a:r>
+              <a:rPr lang="ko-KR" altLang="en-US" sz="1400" dirty="0"/>
+              <a:t>종료</a:t>
+            </a:r>
+          </a:p>
+        </p:txBody>
+      </p:sp>
     </p:spTree>
     <p:extLst>
       <p:ext uri="{BB962C8B-B14F-4D97-AF65-F5344CB8AC3E}">
